--- a/markdown/files/slides/lecture25_p_np.pptx
+++ b/markdown/files/slides/lecture25_p_np.pptx
@@ -250,7 +250,7 @@
           <a:p>
             <a:fld id="{6FB87CB2-66CB-454F-85D3-19EE1B79E95D}" type="datetimeFigureOut">
               <a:rPr lang="en-US" smtClean="0"/>
-              <a:t>3/9/2026</a:t>
+              <a:t>3/11/2026</a:t>
             </a:fld>
             <a:endParaRPr lang="en-US"/>
           </a:p>
@@ -664,7 +664,7 @@
           <a:p>
             <a:fld id="{28421D02-69CC-42C9-85CE-4F8B68ED22B8}" type="datetimeFigureOut">
               <a:rPr lang="en-US" smtClean="0"/>
-              <a:t>3/9/2026</a:t>
+              <a:t>3/11/2026</a:t>
             </a:fld>
             <a:endParaRPr lang="en-US"/>
           </a:p>
@@ -862,7 +862,7 @@
           <a:p>
             <a:fld id="{28421D02-69CC-42C9-85CE-4F8B68ED22B8}" type="datetimeFigureOut">
               <a:rPr lang="en-US" smtClean="0"/>
-              <a:t>3/9/2026</a:t>
+              <a:t>3/11/2026</a:t>
             </a:fld>
             <a:endParaRPr lang="en-US"/>
           </a:p>
@@ -1070,7 +1070,7 @@
           <a:p>
             <a:fld id="{28421D02-69CC-42C9-85CE-4F8B68ED22B8}" type="datetimeFigureOut">
               <a:rPr lang="en-US" smtClean="0"/>
-              <a:t>3/9/2026</a:t>
+              <a:t>3/11/2026</a:t>
             </a:fld>
             <a:endParaRPr lang="en-US"/>
           </a:p>
@@ -1268,7 +1268,7 @@
           <a:p>
             <a:fld id="{28421D02-69CC-42C9-85CE-4F8B68ED22B8}" type="datetimeFigureOut">
               <a:rPr lang="en-US" smtClean="0"/>
-              <a:t>3/9/2026</a:t>
+              <a:t>3/11/2026</a:t>
             </a:fld>
             <a:endParaRPr lang="en-US"/>
           </a:p>
@@ -1543,7 +1543,7 @@
           <a:p>
             <a:fld id="{28421D02-69CC-42C9-85CE-4F8B68ED22B8}" type="datetimeFigureOut">
               <a:rPr lang="en-US" smtClean="0"/>
-              <a:t>3/9/2026</a:t>
+              <a:t>3/11/2026</a:t>
             </a:fld>
             <a:endParaRPr lang="en-US"/>
           </a:p>
@@ -1808,7 +1808,7 @@
           <a:p>
             <a:fld id="{28421D02-69CC-42C9-85CE-4F8B68ED22B8}" type="datetimeFigureOut">
               <a:rPr lang="en-US" smtClean="0"/>
-              <a:t>3/9/2026</a:t>
+              <a:t>3/11/2026</a:t>
             </a:fld>
             <a:endParaRPr lang="en-US"/>
           </a:p>
@@ -2220,7 +2220,7 @@
           <a:p>
             <a:fld id="{28421D02-69CC-42C9-85CE-4F8B68ED22B8}" type="datetimeFigureOut">
               <a:rPr lang="en-US" smtClean="0"/>
-              <a:t>3/9/2026</a:t>
+              <a:t>3/11/2026</a:t>
             </a:fld>
             <a:endParaRPr lang="en-US"/>
           </a:p>
@@ -2361,7 +2361,7 @@
           <a:p>
             <a:fld id="{28421D02-69CC-42C9-85CE-4F8B68ED22B8}" type="datetimeFigureOut">
               <a:rPr lang="en-US" smtClean="0"/>
-              <a:t>3/9/2026</a:t>
+              <a:t>3/11/2026</a:t>
             </a:fld>
             <a:endParaRPr lang="en-US"/>
           </a:p>
@@ -2474,7 +2474,7 @@
           <a:p>
             <a:fld id="{28421D02-69CC-42C9-85CE-4F8B68ED22B8}" type="datetimeFigureOut">
               <a:rPr lang="en-US" smtClean="0"/>
-              <a:t>3/9/2026</a:t>
+              <a:t>3/11/2026</a:t>
             </a:fld>
             <a:endParaRPr lang="en-US"/>
           </a:p>
@@ -2785,7 +2785,7 @@
           <a:p>
             <a:fld id="{28421D02-69CC-42C9-85CE-4F8B68ED22B8}" type="datetimeFigureOut">
               <a:rPr lang="en-US" smtClean="0"/>
-              <a:t>3/9/2026</a:t>
+              <a:t>3/11/2026</a:t>
             </a:fld>
             <a:endParaRPr lang="en-US"/>
           </a:p>
@@ -3073,7 +3073,7 @@
           <a:p>
             <a:fld id="{28421D02-69CC-42C9-85CE-4F8B68ED22B8}" type="datetimeFigureOut">
               <a:rPr lang="en-US" smtClean="0"/>
-              <a:t>3/9/2026</a:t>
+              <a:t>3/11/2026</a:t>
             </a:fld>
             <a:endParaRPr lang="en-US"/>
           </a:p>
@@ -3314,7 +3314,7 @@
           <a:p>
             <a:fld id="{28421D02-69CC-42C9-85CE-4F8B68ED22B8}" type="datetimeFigureOut">
               <a:rPr lang="en-US" smtClean="0"/>
-              <a:t>3/9/2026</a:t>
+              <a:t>3/11/2026</a:t>
             </a:fld>
             <a:endParaRPr lang="en-US"/>
           </a:p>
